--- a/data/deep_dives/carteira_atlanta_364c9ea4/exports/documentary_comparison.pptx
+++ b/data/deep_dives/carteira_atlanta_364c9ea4/exports/documentary_comparison.pptx
@@ -4286,7 +4286,7 @@
                       <a:r>
                         <a:rPr sz="1300" b="1">
                           <a:solidFill>
-                            <a:srgbClr val="1F1F1F"/>
+                            <a:srgbClr val="FFFFFF"/>
                           </a:solidFill>
                           <a:latin typeface="Calibri"/>
                         </a:rPr>
@@ -4296,7 +4296,7 @@
                   </a:txBody>
                   <a:tcPr marL="91440" marR="91440" marT="41148" marB="41148" anchor="ctr">
                     <a:solidFill>
-                      <a:srgbClr val="EC7000"/>
+                      <a:srgbClr val="FF6200"/>
                     </a:solidFill>
                     <a:lnL>
                       <a:noFill/>
@@ -4335,7 +4335,7 @@
                       <a:r>
                         <a:rPr sz="1300" b="1">
                           <a:solidFill>
-                            <a:srgbClr val="1F1F1F"/>
+                            <a:srgbClr val="FFFFFF"/>
                           </a:solidFill>
                           <a:latin typeface="Calibri"/>
                         </a:rPr>
@@ -4345,7 +4345,7 @@
                   </a:txBody>
                   <a:tcPr marL="91440" marR="91440" marT="41148" marB="41148" anchor="ctr">
                     <a:solidFill>
-                      <a:srgbClr val="EC7000"/>
+                      <a:srgbClr val="FF6200"/>
                     </a:solidFill>
                     <a:lnL>
                       <a:noFill/>
@@ -5167,7 +5167,7 @@
                       <a:r>
                         <a:rPr sz="1300" b="1">
                           <a:solidFill>
-                            <a:srgbClr val="1F1F1F"/>
+                            <a:srgbClr val="FFFFFF"/>
                           </a:solidFill>
                           <a:latin typeface="Calibri"/>
                         </a:rPr>
@@ -5177,7 +5177,7 @@
                   </a:txBody>
                   <a:tcPr marL="91440" marR="91440" marT="41148" marB="41148" anchor="ctr">
                     <a:solidFill>
-                      <a:srgbClr val="EC7000"/>
+                      <a:srgbClr val="FF6200"/>
                     </a:solidFill>
                     <a:lnL>
                       <a:noFill/>
@@ -5216,7 +5216,7 @@
                       <a:r>
                         <a:rPr sz="1300" b="1">
                           <a:solidFill>
-                            <a:srgbClr val="1F1F1F"/>
+                            <a:srgbClr val="FFFFFF"/>
                           </a:solidFill>
                           <a:latin typeface="Calibri"/>
                         </a:rPr>
@@ -5226,7 +5226,7 @@
                   </a:txBody>
                   <a:tcPr marL="91440" marR="91440" marT="41148" marB="41148" anchor="ctr">
                     <a:solidFill>
-                      <a:srgbClr val="EC7000"/>
+                      <a:srgbClr val="FF6200"/>
                     </a:solidFill>
                     <a:lnL>
                       <a:noFill/>
@@ -5748,7 +5748,7 @@
                           </a:solidFill>
                           <a:latin typeface="Calibri"/>
                         </a:rPr>
-                        <a:t>Não localizado nas fontes acessíveis desta leitura</a:t>
+                        <a:t>-</a:t>
                       </a:r>
                     </a:p>
                   </a:txBody>
@@ -5952,7 +5952,7 @@
                       <a:r>
                         <a:rPr sz="1300" b="1">
                           <a:solidFill>
-                            <a:srgbClr val="1F1F1F"/>
+                            <a:srgbClr val="FFFFFF"/>
                           </a:solidFill>
                           <a:latin typeface="Calibri"/>
                         </a:rPr>
@@ -5962,7 +5962,7 @@
                   </a:txBody>
                   <a:tcPr marL="91440" marR="91440" marT="41148" marB="41148" anchor="ctr">
                     <a:solidFill>
-                      <a:srgbClr val="EC7000"/>
+                      <a:srgbClr val="FF6200"/>
                     </a:solidFill>
                     <a:lnL>
                       <a:noFill/>
@@ -6001,7 +6001,7 @@
                       <a:r>
                         <a:rPr sz="1300" b="1">
                           <a:solidFill>
-                            <a:srgbClr val="1F1F1F"/>
+                            <a:srgbClr val="FFFFFF"/>
                           </a:solidFill>
                           <a:latin typeface="Calibri"/>
                         </a:rPr>
@@ -6011,7 +6011,7 @@
                   </a:txBody>
                   <a:tcPr marL="91440" marR="91440" marT="41148" marB="41148" anchor="ctr">
                     <a:solidFill>
-                      <a:srgbClr val="EC7000"/>
+                      <a:srgbClr val="FF6200"/>
                     </a:solidFill>
                     <a:lnL>
                       <a:noFill/>
@@ -6487,7 +6487,7 @@
                           </a:solidFill>
                           <a:latin typeface="Calibri"/>
                         </a:rPr>
-                        <a:t>CCBs podem ter ou não coobrigação da instituição financeira; validar cada instrumento</a:t>
+                        <a:t>CCBs podem ter ou não coobrigação da instituição financeira</a:t>
                       </a:r>
                     </a:p>
                   </a:txBody>
@@ -6789,7 +6789,7 @@
                       <a:r>
                         <a:rPr sz="1300" b="1">
                           <a:solidFill>
-                            <a:srgbClr val="1F1F1F"/>
+                            <a:srgbClr val="FFFFFF"/>
                           </a:solidFill>
                           <a:latin typeface="Calibri"/>
                         </a:rPr>
@@ -6799,7 +6799,7 @@
                   </a:txBody>
                   <a:tcPr marL="91440" marR="91440" marT="41148" marB="41148" anchor="ctr">
                     <a:solidFill>
-                      <a:srgbClr val="EC7000"/>
+                      <a:srgbClr val="FF6200"/>
                     </a:solidFill>
                     <a:lnL>
                       <a:noFill/>
@@ -6838,7 +6838,7 @@
                       <a:r>
                         <a:rPr sz="1300" b="1">
                           <a:solidFill>
-                            <a:srgbClr val="1F1F1F"/>
+                            <a:srgbClr val="FFFFFF"/>
                           </a:solidFill>
                           <a:latin typeface="Calibri"/>
                         </a:rPr>
@@ -6848,7 +6848,7 @@
                   </a:txBody>
                   <a:tcPr marL="91440" marR="91440" marT="41148" marB="41148" anchor="ctr">
                     <a:solidFill>
-                      <a:srgbClr val="EC7000"/>
+                      <a:srgbClr val="FF6200"/>
                     </a:solidFill>
                     <a:lnL>
                       <a:noFill/>
@@ -7036,7 +7036,7 @@
                           </a:solidFill>
                           <a:latin typeface="Calibri"/>
                         </a:rPr>
-                        <a:t>Spread final não localizado; remuneração remetida ao suplemento da série</a:t>
+                        <a:t>-</a:t>
                       </a:r>
                     </a:p>
                   </a:txBody>
@@ -7434,7 +7434,7 @@
                       <a:r>
                         <a:rPr sz="1300" b="1">
                           <a:solidFill>
-                            <a:srgbClr val="1F1F1F"/>
+                            <a:srgbClr val="FFFFFF"/>
                           </a:solidFill>
                           <a:latin typeface="Calibri"/>
                         </a:rPr>
@@ -7444,7 +7444,7 @@
                   </a:txBody>
                   <a:tcPr marL="91440" marR="91440" marT="41148" marB="41148" anchor="ctr">
                     <a:solidFill>
-                      <a:srgbClr val="EC7000"/>
+                      <a:srgbClr val="FF6200"/>
                     </a:solidFill>
                     <a:lnL>
                       <a:noFill/>
@@ -7483,7 +7483,7 @@
                       <a:r>
                         <a:rPr sz="1300" b="1">
                           <a:solidFill>
-                            <a:srgbClr val="1F1F1F"/>
+                            <a:srgbClr val="FFFFFF"/>
                           </a:solidFill>
                           <a:latin typeface="Calibri"/>
                         </a:rPr>
@@ -7493,7 +7493,7 @@
                   </a:txBody>
                   <a:tcPr marL="91440" marR="91440" marT="41148" marB="41148" anchor="ctr">
                     <a:solidFill>
-                      <a:srgbClr val="EC7000"/>
+                      <a:srgbClr val="FF6200"/>
                     </a:solidFill>
                     <a:lnL>
                       <a:noFill/>
@@ -7585,7 +7585,7 @@
                           </a:solidFill>
                           <a:latin typeface="Calibri"/>
                         </a:rPr>
-                        <a:t>Não localizado nas fontes acessíveis desta leitura</a:t>
+                        <a:t>-</a:t>
                       </a:r>
                     </a:p>
                   </a:txBody>
@@ -7681,7 +7681,7 @@
                           </a:solidFill>
                           <a:latin typeface="Calibri"/>
                         </a:rPr>
-                        <a:t>Prazos e valores remetidos aos suplementos; cronograma fechado não identificado</a:t>
+                        <a:t>-</a:t>
                       </a:r>
                     </a:p>
                   </a:txBody>
@@ -7779,7 +7779,7 @@
                           </a:solidFill>
                           <a:latin typeface="Calibri"/>
                         </a:rPr>
-                        <a:t>Não localizado nas fontes acessíveis desta leitura</a:t>
+                        <a:t>-</a:t>
                       </a:r>
                     </a:p>
                   </a:txBody>
@@ -7983,7 +7983,7 @@
                       <a:r>
                         <a:rPr sz="1300" b="1">
                           <a:solidFill>
-                            <a:srgbClr val="1F1F1F"/>
+                            <a:srgbClr val="FFFFFF"/>
                           </a:solidFill>
                           <a:latin typeface="Calibri"/>
                         </a:rPr>
@@ -7993,7 +7993,7 @@
                   </a:txBody>
                   <a:tcPr marL="91440" marR="91440" marT="41148" marB="41148" anchor="ctr">
                     <a:solidFill>
-                      <a:srgbClr val="EC7000"/>
+                      <a:srgbClr val="FF6200"/>
                     </a:solidFill>
                     <a:lnL>
                       <a:noFill/>
@@ -8032,7 +8032,7 @@
                       <a:r>
                         <a:rPr sz="1300" b="1">
                           <a:solidFill>
-                            <a:srgbClr val="1F1F1F"/>
+                            <a:srgbClr val="FFFFFF"/>
                           </a:solidFill>
                           <a:latin typeface="Calibri"/>
                         </a:rPr>
@@ -8042,7 +8042,7 @@
                   </a:txBody>
                   <a:tcPr marL="91440" marR="91440" marT="41148" marB="41148" anchor="ctr">
                     <a:solidFill>
-                      <a:srgbClr val="EC7000"/>
+                      <a:srgbClr val="FF6200"/>
                     </a:solidFill>
                     <a:lnL>
                       <a:noFill/>
@@ -8628,7 +8628,7 @@
                       <a:r>
                         <a:rPr sz="1300" b="1">
                           <a:solidFill>
-                            <a:srgbClr val="1F1F1F"/>
+                            <a:srgbClr val="FFFFFF"/>
                           </a:solidFill>
                           <a:latin typeface="Calibri"/>
                         </a:rPr>
@@ -8638,7 +8638,7 @@
                   </a:txBody>
                   <a:tcPr marL="91440" marR="91440" marT="41148" marB="41148" anchor="ctr">
                     <a:solidFill>
-                      <a:srgbClr val="EC7000"/>
+                      <a:srgbClr val="FF6200"/>
                     </a:solidFill>
                     <a:lnL>
                       <a:noFill/>
@@ -8677,7 +8677,7 @@
                       <a:r>
                         <a:rPr sz="1300" b="1">
                           <a:solidFill>
-                            <a:srgbClr val="1F1F1F"/>
+                            <a:srgbClr val="FFFFFF"/>
                           </a:solidFill>
                           <a:latin typeface="Calibri"/>
                         </a:rPr>
@@ -8687,7 +8687,7 @@
                   </a:txBody>
                   <a:tcPr marL="91440" marR="91440" marT="41148" marB="41148" anchor="ctr">
                     <a:solidFill>
-                      <a:srgbClr val="EC7000"/>
+                      <a:srgbClr val="FF6200"/>
                     </a:solidFill>
                     <a:lnL>
                       <a:noFill/>
@@ -8801,29 +8801,7 @@
                           </a:solidFill>
                           <a:latin typeface="Calibri"/>
                         </a:rPr>
-                        <a:t>Direitos creditórios / PL e cotas subordinadas / PL; validar ativo elegível, subclasses e fórmula</a:t>
-                      </a:r>
-                    </a:p>
-                    <a:p>
-                      <a:pPr algn="ctr">
-                        <a:lnSpc>
-                          <a:spcPct val="100000"/>
-                        </a:lnSpc>
-                        <a:spcBef>
-                          <a:spcPts val="0"/>
-                        </a:spcBef>
-                        <a:spcAft>
-                          <a:spcPts val="0"/>
-                        </a:spcAft>
-                      </a:pPr>
-                      <a:r>
-                        <a:rPr sz="1300" b="0">
-                          <a:solidFill>
-                            <a:srgbClr val="1F1F1F"/>
-                          </a:solidFill>
-                          <a:latin typeface="Calibri"/>
-                        </a:rPr>
-                        <a:t>contratual</a:t>
+                        <a:t>Direitos creditórios / PL e cotas subordinadas / PL</a:t>
                       </a:r>
                     </a:p>
                   </a:txBody>
@@ -9157,7 +9135,7 @@
                           </a:solidFill>
                           <a:latin typeface="Calibri"/>
                         </a:rPr>
-                        <a:t>Sem competência IME carregada em cache local</a:t>
+                        <a:t>-</a:t>
                       </a:r>
                     </a:p>
                   </a:txBody>
